--- a/dist/weeks-포트폴리오제작/포트폴리오제작_10주차_편집디자인1.pptx
+++ b/dist/weeks-포트폴리오제작/포트폴리오제작_10주차_편집디자인1.pptx
@@ -2244,7 +2244,7 @@
                 <a:ea typeface="Pretendard" pitchFamily="34" charset="-122"/>
                 <a:cs typeface="Pretendard" pitchFamily="34" charset="-120"/>
               </a:rPr>
-              <a:t>90분 — 강의 20분 · 페이지 제작 실습 60분</a:t>
+              <a:t>120분 — 강의 20분 · 페이지 제작 실습 80분 · 정리 10분</a:t>
             </a:r>
             <a:endParaRPr lang="en-US" sz="1200" dirty="0"/>
           </a:p>
@@ -3830,7 +3830,7 @@
                 <a:ea typeface="Pretendard Black" pitchFamily="34" charset="-122"/>
                 <a:cs typeface="Pretendard Black" pitchFamily="34" charset="-120"/>
               </a:rPr>
-              <a:t>오늘의 90분</a:t>
+              <a:t>오늘의 120분</a:t>
             </a:r>
             <a:endParaRPr lang="en-US" sz="3000" dirty="0"/>
           </a:p>
@@ -3869,7 +3869,7 @@
                 <a:ea typeface="Pretendard" pitchFamily="34" charset="-122"/>
                 <a:cs typeface="Pretendard" pitchFamily="34" charset="-120"/>
               </a:rPr>
-              <a:t>강의 20분 · 페이지 제작 실습 60분</a:t>
+              <a:t>강의 20분 · 페이지 제작 실습 80분 · 정리 10분</a:t>
             </a:r>
             <a:endParaRPr lang="en-US" sz="1150" dirty="0"/>
           </a:p>
@@ -3909,7 +3909,7 @@
         <p:spPr>
           <a:xfrm>
             <a:off x="640080" y="1719072"/>
-            <a:ext cx="1600200" cy="932688"/>
+            <a:ext cx="1600200" cy="830275"/>
           </a:xfrm>
           <a:prstGeom prst="rect">
             <a:avLst/>
@@ -3948,7 +3948,7 @@
         <p:spPr>
           <a:xfrm>
             <a:off x="2377440" y="1719072"/>
-            <a:ext cx="6888175" cy="932688"/>
+            <a:ext cx="6888175" cy="830275"/>
           </a:xfrm>
           <a:prstGeom prst="rect">
             <a:avLst/>
@@ -3987,7 +3987,7 @@
         <p:spPr>
           <a:xfrm>
             <a:off x="9265615" y="1719072"/>
-            <a:ext cx="2286000" cy="932688"/>
+            <a:ext cx="2286000" cy="830275"/>
           </a:xfrm>
           <a:prstGeom prst="rect">
             <a:avLst/>
@@ -4025,7 +4025,7 @@
         </p:nvSpPr>
         <p:spPr>
           <a:xfrm>
-            <a:off x="640080" y="2633472"/>
+            <a:off x="640080" y="2531059"/>
             <a:ext cx="10911535" cy="7315"/>
           </a:xfrm>
           <a:prstGeom prst="rect">
@@ -4050,8 +4050,8 @@
         </p:nvSpPr>
         <p:spPr>
           <a:xfrm>
-            <a:off x="640080" y="2651760"/>
-            <a:ext cx="1600200" cy="932688"/>
+            <a:off x="640080" y="2549347"/>
+            <a:ext cx="1600200" cy="830275"/>
           </a:xfrm>
           <a:prstGeom prst="rect">
             <a:avLst/>
@@ -4075,7 +4075,7 @@
                 <a:ea typeface="Pretendard" pitchFamily="34" charset="-122"/>
                 <a:cs typeface="Pretendard" pitchFamily="34" charset="-120"/>
               </a:rPr>
-              <a:t>00:20–01:20</a:t>
+              <a:t>00:20–01:05</a:t>
             </a:r>
             <a:endParaRPr lang="en-US" sz="1050" dirty="0"/>
           </a:p>
@@ -4089,8 +4089,8 @@
         </p:nvSpPr>
         <p:spPr>
           <a:xfrm>
-            <a:off x="2377440" y="2651760"/>
-            <a:ext cx="6888175" cy="932688"/>
+            <a:off x="2377440" y="2549347"/>
+            <a:ext cx="6888175" cy="830275"/>
           </a:xfrm>
           <a:prstGeom prst="rect">
             <a:avLst/>
@@ -4114,7 +4114,7 @@
                 <a:ea typeface="Pretendard" pitchFamily="34" charset="-122"/>
                 <a:cs typeface="Pretendard" pitchFamily="34" charset="-120"/>
               </a:rPr>
-              <a:t>페이지 제작 실습</a:t>
+              <a:t>페이지 제작 실습 (1)</a:t>
             </a:r>
             <a:endParaRPr lang="en-US" sz="1300" dirty="0"/>
           </a:p>
@@ -4128,8 +4128,8 @@
         </p:nvSpPr>
         <p:spPr>
           <a:xfrm>
-            <a:off x="9265615" y="2651760"/>
-            <a:ext cx="2286000" cy="932688"/>
+            <a:off x="9265615" y="2549347"/>
+            <a:ext cx="2286000" cy="830275"/>
           </a:xfrm>
           <a:prstGeom prst="rect">
             <a:avLst/>
@@ -4167,7 +4167,7 @@
         </p:nvSpPr>
         <p:spPr>
           <a:xfrm>
-            <a:off x="640080" y="3566160"/>
+            <a:off x="640080" y="3361334"/>
             <a:ext cx="10911535" cy="7315"/>
           </a:xfrm>
           <a:prstGeom prst="rect">
@@ -4192,8 +4192,111 @@
         </p:nvSpPr>
         <p:spPr>
           <a:xfrm>
-            <a:off x="640080" y="3584448"/>
-            <a:ext cx="1600200" cy="932688"/>
+            <a:off x="640080" y="3379622"/>
+            <a:ext cx="1600200" cy="830275"/>
+          </a:xfrm>
+          <a:prstGeom prst="rect">
+            <a:avLst/>
+          </a:prstGeom>
+          <a:noFill/>
+          <a:ln/>
+        </p:spPr>
+        <p:txBody>
+          <a:bodyPr wrap="square" lIns="0" tIns="0" rIns="0" bIns="0" rtlCol="0" anchor="ctr"/>
+          <a:lstStyle/>
+          <a:p>
+            <a:pPr indent="0" marL="0">
+              <a:buNone/>
+            </a:pPr>
+            <a:r>
+              <a:rPr lang="en-US" sz="1050" spc="60" kern="0" dirty="0">
+                <a:solidFill>
+                  <a:srgbClr val="9B9B9B"/>
+                </a:solidFill>
+                <a:latin typeface="Pretendard" pitchFamily="34" charset="0"/>
+                <a:ea typeface="Pretendard" pitchFamily="34" charset="-122"/>
+                <a:cs typeface="Pretendard" pitchFamily="34" charset="-120"/>
+              </a:rPr>
+              <a:t>01:05–01:15</a:t>
+            </a:r>
+            <a:endParaRPr lang="en-US" sz="1050" dirty="0"/>
+          </a:p>
+        </p:txBody>
+      </p:sp>
+      <p:sp>
+        <p:nvSpPr>
+          <p:cNvPr id="19" name="Text 17"/>
+          <p:cNvSpPr/>
+          <p:nvPr/>
+        </p:nvSpPr>
+        <p:spPr>
+          <a:xfrm>
+            <a:off x="2377440" y="3379622"/>
+            <a:ext cx="6888175" cy="830275"/>
+          </a:xfrm>
+          <a:prstGeom prst="rect">
+            <a:avLst/>
+          </a:prstGeom>
+          <a:noFill/>
+          <a:ln/>
+        </p:spPr>
+        <p:txBody>
+          <a:bodyPr wrap="square" lIns="0" tIns="0" rIns="0" bIns="0" rtlCol="0" anchor="ctr"/>
+          <a:lstStyle/>
+          <a:p>
+            <a:pPr indent="0" marL="0">
+              <a:buNone/>
+            </a:pPr>
+            <a:r>
+              <a:rPr lang="en-US" sz="1100" dirty="0">
+                <a:solidFill>
+                  <a:srgbClr val="9B9B9B"/>
+                </a:solidFill>
+                <a:latin typeface="Pretendard" pitchFamily="34" charset="0"/>
+                <a:ea typeface="Pretendard" pitchFamily="34" charset="-122"/>
+                <a:cs typeface="Pretendard" pitchFamily="34" charset="-120"/>
+              </a:rPr>
+              <a:t>휴식</a:t>
+            </a:r>
+            <a:endParaRPr lang="en-US" sz="1100" dirty="0"/>
+          </a:p>
+        </p:txBody>
+      </p:sp>
+      <p:sp>
+        <p:nvSpPr>
+          <p:cNvPr id="20" name="Shape 18"/>
+          <p:cNvSpPr/>
+          <p:nvPr/>
+        </p:nvSpPr>
+        <p:spPr>
+          <a:xfrm>
+            <a:off x="640080" y="4191610"/>
+            <a:ext cx="10911535" cy="7315"/>
+          </a:xfrm>
+          <a:prstGeom prst="rect">
+            <a:avLst/>
+          </a:prstGeom>
+          <a:solidFill>
+            <a:srgbClr val="EFEFEF"/>
+          </a:solidFill>
+          <a:ln w="12700">
+            <a:solidFill>
+              <a:srgbClr val="EFEFEF"/>
+            </a:solidFill>
+            <a:prstDash val="solid"/>
+          </a:ln>
+        </p:spPr>
+      </p:sp>
+      <p:sp>
+        <p:nvSpPr>
+          <p:cNvPr id="21" name="Text 19"/>
+          <p:cNvSpPr/>
+          <p:nvPr/>
+        </p:nvSpPr>
+        <p:spPr>
+          <a:xfrm>
+            <a:off x="640080" y="4209898"/>
+            <a:ext cx="1600200" cy="830275"/>
           </a:xfrm>
           <a:prstGeom prst="rect">
             <a:avLst/>
@@ -4217,7 +4320,7 @@
                 <a:ea typeface="Pretendard" pitchFamily="34" charset="-122"/>
                 <a:cs typeface="Pretendard" pitchFamily="34" charset="-120"/>
               </a:rPr>
-              <a:t>01:20–01:30</a:t>
+              <a:t>01:15–01:50</a:t>
             </a:r>
             <a:endParaRPr lang="en-US" sz="1050" dirty="0"/>
           </a:p>
@@ -4225,14 +4328,14 @@
       </p:sp>
       <p:sp>
         <p:nvSpPr>
-          <p:cNvPr id="19" name="Text 17"/>
-          <p:cNvSpPr/>
-          <p:nvPr/>
-        </p:nvSpPr>
-        <p:spPr>
-          <a:xfrm>
-            <a:off x="2377440" y="3584448"/>
-            <a:ext cx="6888175" cy="932688"/>
+          <p:cNvPr id="22" name="Text 20"/>
+          <p:cNvSpPr/>
+          <p:nvPr/>
+        </p:nvSpPr>
+        <p:spPr>
+          <a:xfrm>
+            <a:off x="2377440" y="4209898"/>
+            <a:ext cx="6888175" cy="830275"/>
           </a:xfrm>
           <a:prstGeom prst="rect">
             <a:avLst/>
@@ -4256,6 +4359,148 @@
                 <a:ea typeface="Pretendard" pitchFamily="34" charset="-122"/>
                 <a:cs typeface="Pretendard" pitchFamily="34" charset="-120"/>
               </a:rPr>
+              <a:t>페이지 제작 실습 (2)</a:t>
+            </a:r>
+            <a:endParaRPr lang="en-US" sz="1300" dirty="0"/>
+          </a:p>
+        </p:txBody>
+      </p:sp>
+      <p:sp>
+        <p:nvSpPr>
+          <p:cNvPr id="23" name="Text 21"/>
+          <p:cNvSpPr/>
+          <p:nvPr/>
+        </p:nvSpPr>
+        <p:spPr>
+          <a:xfrm>
+            <a:off x="9265615" y="4209898"/>
+            <a:ext cx="2286000" cy="830275"/>
+          </a:xfrm>
+          <a:prstGeom prst="rect">
+            <a:avLst/>
+          </a:prstGeom>
+          <a:noFill/>
+          <a:ln/>
+        </p:spPr>
+        <p:txBody>
+          <a:bodyPr wrap="square" lIns="0" tIns="0" rIns="0" bIns="0" rtlCol="0" anchor="ctr"/>
+          <a:lstStyle/>
+          <a:p>
+            <a:pPr algn="r" indent="0" marL="0">
+              <a:buNone/>
+            </a:pPr>
+            <a:r>
+              <a:rPr lang="en-US" sz="1050" dirty="0">
+                <a:solidFill>
+                  <a:srgbClr val="6E6E6E"/>
+                </a:solidFill>
+                <a:latin typeface="Pretendard" pitchFamily="34" charset="0"/>
+                <a:ea typeface="Pretendard" pitchFamily="34" charset="-122"/>
+                <a:cs typeface="Pretendard" pitchFamily="34" charset="-120"/>
+              </a:rPr>
+              <a:t>개인 워크 + 순회</a:t>
+            </a:r>
+            <a:endParaRPr lang="en-US" sz="1050" dirty="0"/>
+          </a:p>
+        </p:txBody>
+      </p:sp>
+      <p:sp>
+        <p:nvSpPr>
+          <p:cNvPr id="24" name="Shape 22"/>
+          <p:cNvSpPr/>
+          <p:nvPr/>
+        </p:nvSpPr>
+        <p:spPr>
+          <a:xfrm>
+            <a:off x="640080" y="5021885"/>
+            <a:ext cx="10911535" cy="7315"/>
+          </a:xfrm>
+          <a:prstGeom prst="rect">
+            <a:avLst/>
+          </a:prstGeom>
+          <a:solidFill>
+            <a:srgbClr val="DCDCDC"/>
+          </a:solidFill>
+          <a:ln w="12700">
+            <a:solidFill>
+              <a:srgbClr val="DCDCDC"/>
+            </a:solidFill>
+            <a:prstDash val="solid"/>
+          </a:ln>
+        </p:spPr>
+      </p:sp>
+      <p:sp>
+        <p:nvSpPr>
+          <p:cNvPr id="25" name="Text 23"/>
+          <p:cNvSpPr/>
+          <p:nvPr/>
+        </p:nvSpPr>
+        <p:spPr>
+          <a:xfrm>
+            <a:off x="640080" y="5040173"/>
+            <a:ext cx="1600200" cy="830275"/>
+          </a:xfrm>
+          <a:prstGeom prst="rect">
+            <a:avLst/>
+          </a:prstGeom>
+          <a:noFill/>
+          <a:ln/>
+        </p:spPr>
+        <p:txBody>
+          <a:bodyPr wrap="square" lIns="0" tIns="0" rIns="0" bIns="0" rtlCol="0" anchor="ctr"/>
+          <a:lstStyle/>
+          <a:p>
+            <a:pPr indent="0" marL="0">
+              <a:buNone/>
+            </a:pPr>
+            <a:r>
+              <a:rPr lang="en-US" sz="1050" b="1" spc="60" kern="0" dirty="0">
+                <a:solidFill>
+                  <a:srgbClr val="111111"/>
+                </a:solidFill>
+                <a:latin typeface="Pretendard" pitchFamily="34" charset="0"/>
+                <a:ea typeface="Pretendard" pitchFamily="34" charset="-122"/>
+                <a:cs typeface="Pretendard" pitchFamily="34" charset="-120"/>
+              </a:rPr>
+              <a:t>01:50–02:00</a:t>
+            </a:r>
+            <a:endParaRPr lang="en-US" sz="1050" dirty="0"/>
+          </a:p>
+        </p:txBody>
+      </p:sp>
+      <p:sp>
+        <p:nvSpPr>
+          <p:cNvPr id="26" name="Text 24"/>
+          <p:cNvSpPr/>
+          <p:nvPr/>
+        </p:nvSpPr>
+        <p:spPr>
+          <a:xfrm>
+            <a:off x="2377440" y="5040173"/>
+            <a:ext cx="6888175" cy="830275"/>
+          </a:xfrm>
+          <a:prstGeom prst="rect">
+            <a:avLst/>
+          </a:prstGeom>
+          <a:noFill/>
+          <a:ln/>
+        </p:spPr>
+        <p:txBody>
+          <a:bodyPr wrap="square" lIns="0" tIns="0" rIns="0" bIns="0" rtlCol="0" anchor="ctr"/>
+          <a:lstStyle/>
+          <a:p>
+            <a:pPr indent="0" marL="0">
+              <a:buNone/>
+            </a:pPr>
+            <a:r>
+              <a:rPr lang="en-US" sz="1300" b="1" dirty="0">
+                <a:solidFill>
+                  <a:srgbClr val="111111"/>
+                </a:solidFill>
+                <a:latin typeface="Pretendard" pitchFamily="34" charset="0"/>
+                <a:ea typeface="Pretendard" pitchFamily="34" charset="-122"/>
+                <a:cs typeface="Pretendard" pitchFamily="34" charset="-120"/>
+              </a:rPr>
               <a:t>진행 확인 · 과제 안내</a:t>
             </a:r>
             <a:endParaRPr lang="en-US" sz="1300" dirty="0"/>
@@ -4264,14 +4509,14 @@
       </p:sp>
       <p:sp>
         <p:nvSpPr>
-          <p:cNvPr id="20" name="Text 18"/>
-          <p:cNvSpPr/>
-          <p:nvPr/>
-        </p:nvSpPr>
-        <p:spPr>
-          <a:xfrm>
-            <a:off x="9265615" y="3584448"/>
-            <a:ext cx="2286000" cy="932688"/>
+          <p:cNvPr id="27" name="Text 25"/>
+          <p:cNvSpPr/>
+          <p:nvPr/>
+        </p:nvSpPr>
+        <p:spPr>
+          <a:xfrm>
+            <a:off x="9265615" y="5040173"/>
+            <a:ext cx="2286000" cy="830275"/>
           </a:xfrm>
           <a:prstGeom prst="rect">
             <a:avLst/>
@@ -4303,14 +4548,14 @@
       </p:sp>
       <p:sp>
         <p:nvSpPr>
-          <p:cNvPr id="21" name="Shape 19"/>
-          <p:cNvSpPr/>
-          <p:nvPr/>
-        </p:nvSpPr>
-        <p:spPr>
-          <a:xfrm>
-            <a:off x="640080" y="4828032"/>
-            <a:ext cx="10911535" cy="969264"/>
+          <p:cNvPr id="28" name="Shape 26"/>
+          <p:cNvSpPr/>
+          <p:nvPr/>
+        </p:nvSpPr>
+        <p:spPr>
+          <a:xfrm>
+            <a:off x="640080" y="5852160"/>
+            <a:ext cx="10911535" cy="7315"/>
           </a:xfrm>
           <a:prstGeom prst="rect">
             <a:avLst/>
@@ -4328,88 +4573,7 @@
       </p:sp>
       <p:sp>
         <p:nvSpPr>
-          <p:cNvPr id="22" name="Text 20"/>
-          <p:cNvSpPr/>
-          <p:nvPr/>
-        </p:nvSpPr>
-        <p:spPr>
-          <a:xfrm>
-            <a:off x="1097280" y="5010912"/>
-            <a:ext cx="2743200" cy="256032"/>
-          </a:xfrm>
-          <a:prstGeom prst="rect">
-            <a:avLst/>
-          </a:prstGeom>
-          <a:noFill/>
-          <a:ln/>
-        </p:spPr>
-        <p:txBody>
-          <a:bodyPr wrap="square" lIns="0" tIns="0" rIns="0" bIns="0" rtlCol="0" anchor="ctr"/>
-          <a:lstStyle/>
-          <a:p>
-            <a:pPr indent="0" marL="0">
-              <a:buNone/>
-            </a:pPr>
-            <a:r>
-              <a:rPr lang="en-US" sz="950" spc="240" kern="0" dirty="0">
-                <a:solidFill>
-                  <a:srgbClr val="9A9A9A"/>
-                </a:solidFill>
-                <a:latin typeface="Pretendard" pitchFamily="34" charset="0"/>
-                <a:ea typeface="Pretendard" pitchFamily="34" charset="-122"/>
-                <a:cs typeface="Pretendard" pitchFamily="34" charset="-120"/>
-              </a:rPr>
-              <a:t>오늘 끝나면</a:t>
-            </a:r>
-            <a:endParaRPr lang="en-US" sz="950" dirty="0"/>
-          </a:p>
-        </p:txBody>
-      </p:sp>
-      <p:sp>
-        <p:nvSpPr>
-          <p:cNvPr id="23" name="Text 21"/>
-          <p:cNvSpPr/>
-          <p:nvPr/>
-        </p:nvSpPr>
-        <p:spPr>
-          <a:xfrm>
-            <a:off x="1097280" y="5285232"/>
-            <a:ext cx="9997135" cy="365760"/>
-          </a:xfrm>
-          <a:prstGeom prst="rect">
-            <a:avLst/>
-          </a:prstGeom>
-          <a:noFill/>
-          <a:ln/>
-        </p:spPr>
-        <p:txBody>
-          <a:bodyPr wrap="square" lIns="0" tIns="0" rIns="0" bIns="0" rtlCol="0" anchor="ctr"/>
-          <a:lstStyle/>
-          <a:p>
-            <a:pPr indent="0" marL="0">
-              <a:lnSpc>
-                <a:spcPct val="126000"/>
-              </a:lnSpc>
-              <a:buNone/>
-            </a:pPr>
-            <a:r>
-              <a:rPr lang="en-US" sz="1600" dirty="0">
-                <a:solidFill>
-                  <a:srgbClr val="FFFFFF"/>
-                </a:solidFill>
-                <a:latin typeface="Pretendard Black" pitchFamily="34" charset="0"/>
-                <a:ea typeface="Pretendard Black" pitchFamily="34" charset="-122"/>
-                <a:cs typeface="Pretendard Black" pitchFamily="34" charset="-120"/>
-              </a:rPr>
-              <a:t>그리드와 타이포 시스템을 적용한 페이지가 실제로 나오기 시작합니다.</a:t>
-            </a:r>
-            <a:endParaRPr lang="en-US" sz="1600" dirty="0"/>
-          </a:p>
-        </p:txBody>
-      </p:sp>
-      <p:sp>
-        <p:nvSpPr>
-          <p:cNvPr id="24" name="Shape 22"/>
+          <p:cNvPr id="29" name="Shape 27"/>
           <p:cNvSpPr/>
           <p:nvPr/>
         </p:nvSpPr>
@@ -4434,7 +4598,7 @@
       </p:sp>
       <p:sp>
         <p:nvSpPr>
-          <p:cNvPr id="25" name="Text 23"/>
+          <p:cNvPr id="30" name="Text 28"/>
           <p:cNvSpPr/>
           <p:nvPr/>
         </p:nvSpPr>
@@ -4473,7 +4637,7 @@
       </p:sp>
       <p:sp>
         <p:nvSpPr>
-          <p:cNvPr id="26" name="Text 24"/>
+          <p:cNvPr id="31" name="Text 29"/>
           <p:cNvSpPr/>
           <p:nvPr/>
         </p:nvSpPr>
@@ -9973,7 +10137,7 @@
                 <a:ea typeface="Pretendard" pitchFamily="34" charset="-122"/>
                 <a:cs typeface="Pretendard" pitchFamily="34" charset="-120"/>
               </a:rPr>
-              <a:t>60분 · 개인 — 오늘 안에 최소 1장은 끝냅니다.</a:t>
+              <a:t>80분 · 개인 — 오늘 안에 최소 2장은 끝냅니다. 중간에 휴식이 한 번 들어갑니다.</a:t>
             </a:r>
             <a:endParaRPr lang="en-US" sz="1150" dirty="0"/>
           </a:p>
@@ -10182,7 +10346,7 @@
                 <a:ea typeface="Pretendard Light" pitchFamily="34" charset="-122"/>
                 <a:cs typeface="Pretendard Light" pitchFamily="34" charset="-120"/>
               </a:rPr>
-              <a:t>15분</a:t>
+              <a:t>20분</a:t>
             </a:r>
             <a:endParaRPr lang="en-US" sz="2200" dirty="0"/>
           </a:p>
@@ -10327,7 +10491,7 @@
                 <a:ea typeface="Pretendard Light" pitchFamily="34" charset="-122"/>
                 <a:cs typeface="Pretendard Light" pitchFamily="34" charset="-120"/>
               </a:rPr>
-              <a:t>20분</a:t>
+              <a:t>27분</a:t>
             </a:r>
             <a:endParaRPr lang="en-US" sz="2200" dirty="0"/>
           </a:p>
@@ -10472,7 +10636,7 @@
                 <a:ea typeface="Pretendard Light" pitchFamily="34" charset="-122"/>
                 <a:cs typeface="Pretendard Light" pitchFamily="34" charset="-120"/>
               </a:rPr>
-              <a:t>20분</a:t>
+              <a:t>28분</a:t>
             </a:r>
             <a:endParaRPr lang="en-US" sz="2200" dirty="0"/>
           </a:p>

--- a/dist/weeks-포트폴리오제작/포트폴리오제작_10주차_편집디자인1.pptx
+++ b/dist/weeks-포트폴리오제작/포트폴리오제작_10주차_편집디자인1.pptx
@@ -511,7 +511,8 @@
           <a:p>
             <a:r>
               <a:rPr lang="en-US" dirty="0"/>
-              <a:t>10~11주가 학기에서 가장 손이 많이 가는 구간이다. 실습 시간이 60분뿐이므로 수업 밖 작업이 필수라는 점을 미리 말해둘 것.</a:t>
+              <a:t>[운영 메모]
+10~11주가 학기에서 가장 손이 많이 가는 구간이다. 실습 시간이 60분뿐이므로 수업 밖 작업이 필수라는 점을 미리 말해둘 것.</a:t>
             </a:r>
             <a:endParaRPr lang="en-US" dirty="0"/>
           </a:p>
@@ -599,7 +600,8 @@
           <a:p>
             <a:r>
               <a:rPr lang="en-US" dirty="0"/>
-              <a:t>해상도 부족은 11주차에 발견되면 늦다. 이번 주에 확인시킬 것.</a:t>
+              <a:t>[운영 메모]
+해상도 부족은 11주차에 발견되면 늦다. 이번 주에 확인시킬 것.</a:t>
             </a:r>
             <a:endParaRPr lang="en-US" dirty="0"/>
           </a:p>
@@ -687,7 +689,8 @@
           <a:p>
             <a:r>
               <a:rPr lang="en-US" dirty="0"/>
-              <a:t>순회하면서 그리드 가이드를 켜놓고 작업하는지 확인할 것. 가이드를 끄고 눈대중으로 맞추는 학생이 많다.</a:t>
+              <a:t>[운영 메모]
+순회하면서 그리드 가이드를 켜놓고 작업하는지 확인할 것. 가이드를 끄고 눈대중으로 맞추는 학생이 많다.</a:t>
             </a:r>
             <a:endParaRPr lang="en-US" dirty="0"/>
           </a:p>
@@ -775,7 +778,8 @@
           <a:p>
             <a:r>
               <a:rPr lang="en-US" dirty="0"/>
-              <a:t>오늘부터 실제 결과물이 나온다. 학생들의 동기가 올라가는 시점.</a:t>
+              <a:t>[운영 메모]
+오늘부터 실제 결과물이 나온다. 학생들의 동기가 올라가는 시점.</a:t>
             </a:r>
             <a:endParaRPr lang="en-US" dirty="0"/>
           </a:p>
@@ -863,7 +867,8 @@
           <a:p>
             <a:r>
               <a:rPr lang="en-US" dirty="0"/>
-              <a:t>짧게. 나머지는 손으로.</a:t>
+              <a:t>[운영 메모]
+짧게. 나머지는 손으로.</a:t>
             </a:r>
             <a:endParaRPr lang="en-US" dirty="0"/>
           </a:p>
@@ -951,7 +956,8 @@
           <a:p>
             <a:r>
               <a:rPr lang="en-US" dirty="0"/>
-              <a:t>6주차에서 쓴 '축소해서 보기'를 다시 활용. 일관된 검증 방법을 반복하는 것이 좋다.</a:t>
+              <a:t>[운영 메모]
+6주차에서 쓴 '축소해서 보기'를 다시 활용. 일관된 검증 방법을 반복하는 것이 좋다.</a:t>
             </a:r>
             <a:endParaRPr lang="en-US" dirty="0"/>
           </a:p>
@@ -1039,7 +1045,8 @@
           <a:p>
             <a:r>
               <a:rPr lang="en-US" dirty="0"/>
-              <a:t>'강조가 여러 개면 강조가 아니다'를 반복 강조.</a:t>
+              <a:t>[운영 메모]
+'강조가 여러 개면 강조가 아니다'를 반복 강조.</a:t>
             </a:r>
             <a:endParaRPr lang="en-US" dirty="0"/>
           </a:p>
@@ -1127,7 +1134,8 @@
           <a:p>
             <a:r>
               <a:rPr lang="en-US" dirty="0"/>
-              <a:t>짧게 하고 실습으로.</a:t>
+              <a:t>[운영 메모]
+짧게 하고 실습으로.</a:t>
             </a:r>
             <a:endParaRPr lang="en-US" dirty="0"/>
           </a:p>
@@ -1215,7 +1223,8 @@
           <a:p>
             <a:r>
               <a:rPr lang="en-US" dirty="0"/>
-              <a:t>'간격 값 3~4개로 제한'은 즉시 효과가 나타나는 조언이다. 실습에서 확인할 것.</a:t>
+              <a:t>[운영 메모]
+'간격 값 3~4개로 제한'은 즉시 효과가 나타나는 조언이다. 실습에서 확인할 것.</a:t>
             </a:r>
             <a:endParaRPr lang="en-US" dirty="0"/>
           </a:p>
@@ -1303,7 +1312,8 @@
           <a:p>
             <a:r>
               <a:rPr lang="en-US" dirty="0"/>
-              <a:t>3장을 다 끝내는 학생은 드물다. 1장을 제대로 끝내고 나머지는 과제로 가는 것이 현실적이다.</a:t>
+              <a:t>[운영 메모]
+3장을 다 끝내는 학생은 드물다. 1장을 제대로 끝내고 나머지는 과제로 가는 것이 현실적이다.</a:t>
             </a:r>
             <a:endParaRPr lang="en-US" dirty="0"/>
           </a:p>
